--- a/WordProcessor_Complete_Final.pptx
+++ b/WordProcessor_Complete_Final.pptx
@@ -860,7 +860,7 @@
           <a:p>
             <a:fld id="{5BCAD085-E8A6-8845-BD4E-CB4CCA059FC4}" type="datetimeFigureOut">
               <a:rPr lang="en-US" smtClean="0"/>
-              <a:t>3/10/2026</a:t>
+              <a:t>3/11/2026</a:t>
             </a:fld>
             <a:endParaRPr lang="en-US"/>
           </a:p>
@@ -1111,7 +1111,7 @@
           <a:p>
             <a:fld id="{5BCAD085-E8A6-8845-BD4E-CB4CCA059FC4}" type="datetimeFigureOut">
               <a:rPr lang="en-US" smtClean="0"/>
-              <a:t>3/10/2026</a:t>
+              <a:t>3/11/2026</a:t>
             </a:fld>
             <a:endParaRPr lang="en-US"/>
           </a:p>
@@ -1425,7 +1425,7 @@
           <a:p>
             <a:fld id="{5BCAD085-E8A6-8845-BD4E-CB4CCA059FC4}" type="datetimeFigureOut">
               <a:rPr lang="en-US" smtClean="0"/>
-              <a:t>3/10/2026</a:t>
+              <a:t>3/11/2026</a:t>
             </a:fld>
             <a:endParaRPr lang="en-US"/>
           </a:p>
@@ -1766,7 +1766,7 @@
           <a:p>
             <a:fld id="{5BCAD085-E8A6-8845-BD4E-CB4CCA059FC4}" type="datetimeFigureOut">
               <a:rPr lang="en-US" smtClean="0"/>
-              <a:t>3/10/2026</a:t>
+              <a:t>3/11/2026</a:t>
             </a:fld>
             <a:endParaRPr lang="en-US"/>
           </a:p>
@@ -2080,7 +2080,7 @@
           <a:p>
             <a:fld id="{5BCAD085-E8A6-8845-BD4E-CB4CCA059FC4}" type="datetimeFigureOut">
               <a:rPr lang="en-US" smtClean="0"/>
-              <a:t>3/10/2026</a:t>
+              <a:t>3/11/2026</a:t>
             </a:fld>
             <a:endParaRPr lang="en-US"/>
           </a:p>
@@ -2473,7 +2473,7 @@
           <a:p>
             <a:fld id="{5BCAD085-E8A6-8845-BD4E-CB4CCA059FC4}" type="datetimeFigureOut">
               <a:rPr lang="en-US" smtClean="0"/>
-              <a:t>3/10/2026</a:t>
+              <a:t>3/11/2026</a:t>
             </a:fld>
             <a:endParaRPr lang="en-US"/>
           </a:p>
@@ -2643,7 +2643,7 @@
           <a:p>
             <a:fld id="{5BCAD085-E8A6-8845-BD4E-CB4CCA059FC4}" type="datetimeFigureOut">
               <a:rPr lang="en-US" smtClean="0"/>
-              <a:t>3/10/2026</a:t>
+              <a:t>3/11/2026</a:t>
             </a:fld>
             <a:endParaRPr lang="en-US"/>
           </a:p>
@@ -2823,7 +2823,7 @@
           <a:p>
             <a:fld id="{5BCAD085-E8A6-8845-BD4E-CB4CCA059FC4}" type="datetimeFigureOut">
               <a:rPr lang="en-US" smtClean="0"/>
-              <a:t>3/10/2026</a:t>
+              <a:t>3/11/2026</a:t>
             </a:fld>
             <a:endParaRPr lang="en-US"/>
           </a:p>
@@ -2999,7 +2999,7 @@
           <a:p>
             <a:fld id="{5BCAD085-E8A6-8845-BD4E-CB4CCA059FC4}" type="datetimeFigureOut">
               <a:rPr lang="en-US" smtClean="0"/>
-              <a:t>3/10/2026</a:t>
+              <a:t>3/11/2026</a:t>
             </a:fld>
             <a:endParaRPr lang="en-US"/>
           </a:p>
@@ -3246,7 +3246,7 @@
           <a:p>
             <a:fld id="{5BCAD085-E8A6-8845-BD4E-CB4CCA059FC4}" type="datetimeFigureOut">
               <a:rPr lang="en-US" smtClean="0"/>
-              <a:t>3/10/2026</a:t>
+              <a:t>3/11/2026</a:t>
             </a:fld>
             <a:endParaRPr lang="en-US"/>
           </a:p>
@@ -3478,7 +3478,7 @@
           <a:p>
             <a:fld id="{5BCAD085-E8A6-8845-BD4E-CB4CCA059FC4}" type="datetimeFigureOut">
               <a:rPr lang="en-US" smtClean="0"/>
-              <a:t>3/10/2026</a:t>
+              <a:t>3/11/2026</a:t>
             </a:fld>
             <a:endParaRPr lang="en-US"/>
           </a:p>
@@ -3852,7 +3852,7 @@
           <a:p>
             <a:fld id="{5BCAD085-E8A6-8845-BD4E-CB4CCA059FC4}" type="datetimeFigureOut">
               <a:rPr lang="en-US" smtClean="0"/>
-              <a:t>3/10/2026</a:t>
+              <a:t>3/11/2026</a:t>
             </a:fld>
             <a:endParaRPr lang="en-US"/>
           </a:p>
@@ -3975,7 +3975,7 @@
           <a:p>
             <a:fld id="{5BCAD085-E8A6-8845-BD4E-CB4CCA059FC4}" type="datetimeFigureOut">
               <a:rPr lang="en-US" smtClean="0"/>
-              <a:t>3/10/2026</a:t>
+              <a:t>3/11/2026</a:t>
             </a:fld>
             <a:endParaRPr lang="en-US"/>
           </a:p>
@@ -4070,7 +4070,7 @@
           <a:p>
             <a:fld id="{5BCAD085-E8A6-8845-BD4E-CB4CCA059FC4}" type="datetimeFigureOut">
               <a:rPr lang="en-US" smtClean="0"/>
-              <a:t>3/10/2026</a:t>
+              <a:t>3/11/2026</a:t>
             </a:fld>
             <a:endParaRPr lang="en-US"/>
           </a:p>
@@ -4325,7 +4325,7 @@
           <a:p>
             <a:fld id="{5BCAD085-E8A6-8845-BD4E-CB4CCA059FC4}" type="datetimeFigureOut">
               <a:rPr lang="en-US" smtClean="0"/>
-              <a:t>3/10/2026</a:t>
+              <a:t>3/11/2026</a:t>
             </a:fld>
             <a:endParaRPr lang="en-US"/>
           </a:p>
@@ -4588,7 +4588,7 @@
           <a:p>
             <a:fld id="{5BCAD085-E8A6-8845-BD4E-CB4CCA059FC4}" type="datetimeFigureOut">
               <a:rPr lang="en-US" smtClean="0"/>
-              <a:t>3/10/2026</a:t>
+              <a:t>3/11/2026</a:t>
             </a:fld>
             <a:endParaRPr lang="en-US"/>
           </a:p>
@@ -5331,7 +5331,7 @@
           <a:p>
             <a:fld id="{5BCAD085-E8A6-8845-BD4E-CB4CCA059FC4}" type="datetimeFigureOut">
               <a:rPr lang="en-US" smtClean="0"/>
-              <a:t>3/10/2026</a:t>
+              <a:t>3/11/2026</a:t>
             </a:fld>
             <a:endParaRPr lang="en-US"/>
           </a:p>
@@ -6462,12 +6462,10 @@
             </a:r>
             <a:r>
               <a:rPr lang="en-US" sz="1200" b="1" i="0" dirty="0">
-                <a:solidFill>
-                  <a:srgbClr val="0F172A"/>
-                </a:solidFill>
-                <a:latin typeface="Calibri"/>
-              </a:rPr>
-              <a:t>NSDA Web development level 3</a:t>
+                <a:effectLst/>
+                <a:latin typeface="inherit"/>
+              </a:rPr>
+              <a:t>Web Design and Development for Freelancing</a:t>
             </a:r>
             <a:r>
               <a:rPr sz="1200" b="1" i="0" dirty="0">
